--- a/SOC-213-Family-Book-Template.pptx
+++ b/SOC-213-Family-Book-Template.pptx
@@ -15,7 +15,8 @@
     <p:sldId id="263" r:id="rId9"/>
     <p:sldId id="264" r:id="rId10"/>
     <p:sldId id="265" r:id="rId11"/>
-    <p:sldId id="266" r:id="rId12"/>
+    <p:sldId id="267" r:id="rId12"/>
+    <p:sldId id="266" r:id="rId13"/>
   </p:sldIdLst>
   <p:sldSz cx="12193588" cy="6858000"/>
   <p:notesSz cx="6858000" cy="9144000"/>
@@ -114,6 +115,11 @@
       </a:defRPr>
     </a:lvl9pPr>
   </p:defaultTextStyle>
+  <p:extLst>
+    <p:ext uri="{EFAFB233-063F-42B5-8137-9DF3F51BA10A}">
+      <p15:sldGuideLst xmlns:p15="http://schemas.microsoft.com/office/powerpoint/2012/main"/>
+    </p:ext>
+  </p:extLst>
 </p:presentation>
 </file>
 
@@ -5329,7 +5335,7 @@
         <p:spPr>
           <a:xfrm>
             <a:off x="55440" y="426960"/>
-            <a:ext cx="5943600" cy="1585800"/>
+            <a:ext cx="5943600" cy="1387176"/>
           </a:xfrm>
           <a:prstGeom prst="rect">
             <a:avLst/>
@@ -5387,7 +5393,7 @@
               </a:tabLst>
             </a:pPr>
             <a:r>
-              <a:rPr lang="en-US" sz="1400" b="1" u="none" strike="noStrike">
+              <a:rPr lang="en-US" sz="1400" b="1" u="none" strike="noStrike" dirty="0">
                 <a:solidFill>
                   <a:srgbClr val="000000"/>
                 </a:solidFill>
@@ -5397,7 +5403,7 @@
               </a:rPr>
               <a:t>Two Key Takeaway Section One:</a:t>
             </a:r>
-            <a:endParaRPr lang="en-US" sz="1400" b="0" u="none" strike="noStrike">
+            <a:endParaRPr lang="en-US" sz="1400" b="0" u="none" strike="noStrike" dirty="0">
               <a:solidFill>
                 <a:srgbClr val="FFFFFF"/>
               </a:solidFill>
@@ -5423,7 +5429,7 @@
                 <a:tab pos="10058400" algn="l"/>
               </a:tabLst>
             </a:pPr>
-            <a:endParaRPr lang="en-US" sz="1400" b="0" u="none" strike="noStrike">
+            <a:endParaRPr lang="en-US" sz="1400" b="0" u="none" strike="noStrike" dirty="0">
               <a:solidFill>
                 <a:srgbClr val="FFFFFF"/>
               </a:solidFill>
@@ -5449,7 +5455,7 @@
                 <a:tab pos="10058400" algn="l"/>
               </a:tabLst>
             </a:pPr>
-            <a:endParaRPr lang="en-US" sz="1400" b="0" u="none" strike="noStrike">
+            <a:endParaRPr lang="en-US" sz="1400" b="0" u="none" strike="noStrike" dirty="0">
               <a:solidFill>
                 <a:srgbClr val="FFFFFF"/>
               </a:solidFill>
@@ -5475,7 +5481,7 @@
                 <a:tab pos="10058400" algn="l"/>
               </a:tabLst>
             </a:pPr>
-            <a:endParaRPr lang="en-US" sz="1400" b="0" u="none" strike="noStrike">
+            <a:endParaRPr lang="en-US" sz="1400" b="0" u="none" strike="noStrike" dirty="0">
               <a:solidFill>
                 <a:srgbClr val="FFFFFF"/>
               </a:solidFill>
@@ -5501,7 +5507,7 @@
                 <a:tab pos="10058400" algn="l"/>
               </a:tabLst>
             </a:pPr>
-            <a:endParaRPr lang="en-US" sz="1400" b="0" u="none" strike="noStrike">
+            <a:endParaRPr lang="en-US" sz="1400" b="0" u="none" strike="noStrike" dirty="0">
               <a:solidFill>
                 <a:srgbClr val="FFFFFF"/>
               </a:solidFill>
@@ -5527,33 +5533,7 @@
                 <a:tab pos="10058400" algn="l"/>
               </a:tabLst>
             </a:pPr>
-            <a:endParaRPr lang="en-US" sz="1400" b="0" u="none" strike="noStrike">
-              <a:solidFill>
-                <a:srgbClr val="FFFFFF"/>
-              </a:solidFill>
-              <a:effectLst/>
-              <a:uFillTx/>
-              <a:latin typeface="Neue Haas Grotesk Text Pro"/>
-            </a:endParaRPr>
-          </a:p>
-          <a:p>
-            <a:pPr>
-              <a:tabLst>
-                <a:tab pos="0" algn="l"/>
-                <a:tab pos="914400" algn="l"/>
-                <a:tab pos="1828800" algn="l"/>
-                <a:tab pos="2743200" algn="l"/>
-                <a:tab pos="3657600" algn="l"/>
-                <a:tab pos="4572000" algn="l"/>
-                <a:tab pos="5486400" algn="l"/>
-                <a:tab pos="6400800" algn="l"/>
-                <a:tab pos="7315200" algn="l"/>
-                <a:tab pos="8229600" algn="l"/>
-                <a:tab pos="9144000" algn="l"/>
-                <a:tab pos="10058400" algn="l"/>
-              </a:tabLst>
-            </a:pPr>
-            <a:endParaRPr lang="en-US" sz="1400" b="0" u="none" strike="noStrike">
+            <a:endParaRPr lang="en-US" sz="1400" b="0" u="none" strike="noStrike" dirty="0">
               <a:solidFill>
                 <a:srgbClr val="FFFFFF"/>
               </a:solidFill>
@@ -5573,7 +5553,7 @@
         <p:spPr>
           <a:xfrm>
             <a:off x="6141960" y="426960"/>
-            <a:ext cx="5943600" cy="1585800"/>
+            <a:ext cx="5943600" cy="1387176"/>
           </a:xfrm>
           <a:prstGeom prst="rect">
             <a:avLst/>
@@ -5631,7 +5611,7 @@
               </a:tabLst>
             </a:pPr>
             <a:r>
-              <a:rPr lang="en-US" sz="1400" b="1" u="none" strike="noStrike">
+              <a:rPr lang="en-US" sz="1400" b="1" u="none" strike="noStrike" dirty="0">
                 <a:solidFill>
                   <a:srgbClr val="000000"/>
                 </a:solidFill>
@@ -5641,7 +5621,7 @@
               </a:rPr>
               <a:t>Two Key Takeaway Section Two:</a:t>
             </a:r>
-            <a:endParaRPr lang="en-US" sz="1400" b="0" u="none" strike="noStrike">
+            <a:endParaRPr lang="en-US" sz="1400" b="0" u="none" strike="noStrike" dirty="0">
               <a:solidFill>
                 <a:srgbClr val="FFFFFF"/>
               </a:solidFill>
@@ -5667,7 +5647,7 @@
                 <a:tab pos="10058400" algn="l"/>
               </a:tabLst>
             </a:pPr>
-            <a:endParaRPr lang="en-US" sz="1400" b="0" u="none" strike="noStrike">
+            <a:endParaRPr lang="en-US" sz="1400" b="0" u="none" strike="noStrike" dirty="0">
               <a:solidFill>
                 <a:srgbClr val="FFFFFF"/>
               </a:solidFill>
@@ -5693,7 +5673,7 @@
                 <a:tab pos="10058400" algn="l"/>
               </a:tabLst>
             </a:pPr>
-            <a:endParaRPr lang="en-US" sz="1400" b="0" u="none" strike="noStrike">
+            <a:endParaRPr lang="en-US" sz="1400" b="0" u="none" strike="noStrike" dirty="0">
               <a:solidFill>
                 <a:srgbClr val="FFFFFF"/>
               </a:solidFill>
@@ -5719,7 +5699,7 @@
                 <a:tab pos="10058400" algn="l"/>
               </a:tabLst>
             </a:pPr>
-            <a:endParaRPr lang="en-US" sz="1400" b="0" u="none" strike="noStrike">
+            <a:endParaRPr lang="en-US" sz="1400" b="0" u="none" strike="noStrike" dirty="0">
               <a:solidFill>
                 <a:srgbClr val="FFFFFF"/>
               </a:solidFill>
@@ -5745,7 +5725,7 @@
                 <a:tab pos="10058400" algn="l"/>
               </a:tabLst>
             </a:pPr>
-            <a:endParaRPr lang="en-US" sz="1400" b="0" u="none" strike="noStrike">
+            <a:endParaRPr lang="en-US" sz="1400" b="0" u="none" strike="noStrike" dirty="0">
               <a:solidFill>
                 <a:srgbClr val="FFFFFF"/>
               </a:solidFill>
@@ -5771,33 +5751,7 @@
                 <a:tab pos="10058400" algn="l"/>
               </a:tabLst>
             </a:pPr>
-            <a:endParaRPr lang="en-US" sz="1400" b="0" u="none" strike="noStrike">
-              <a:solidFill>
-                <a:srgbClr val="FFFFFF"/>
-              </a:solidFill>
-              <a:effectLst/>
-              <a:uFillTx/>
-              <a:latin typeface="Neue Haas Grotesk Text Pro"/>
-            </a:endParaRPr>
-          </a:p>
-          <a:p>
-            <a:pPr>
-              <a:tabLst>
-                <a:tab pos="0" algn="l"/>
-                <a:tab pos="914400" algn="l"/>
-                <a:tab pos="1828800" algn="l"/>
-                <a:tab pos="2743200" algn="l"/>
-                <a:tab pos="3657600" algn="l"/>
-                <a:tab pos="4572000" algn="l"/>
-                <a:tab pos="5486400" algn="l"/>
-                <a:tab pos="6400800" algn="l"/>
-                <a:tab pos="7315200" algn="l"/>
-                <a:tab pos="8229600" algn="l"/>
-                <a:tab pos="9144000" algn="l"/>
-                <a:tab pos="10058400" algn="l"/>
-              </a:tabLst>
-            </a:pPr>
-            <a:endParaRPr lang="en-US" sz="1400" b="0" u="none" strike="noStrike">
+            <a:endParaRPr lang="en-US" sz="1400" b="0" u="none" strike="noStrike" dirty="0">
               <a:solidFill>
                 <a:srgbClr val="FFFFFF"/>
               </a:solidFill>
@@ -5817,7 +5771,7 @@
         <p:spPr>
           <a:xfrm>
             <a:off x="55440" y="2027160"/>
-            <a:ext cx="5943600" cy="1585800"/>
+            <a:ext cx="5943600" cy="1387176"/>
           </a:xfrm>
           <a:prstGeom prst="rect">
             <a:avLst/>
@@ -5875,7 +5829,7 @@
               </a:tabLst>
             </a:pPr>
             <a:r>
-              <a:rPr lang="en-US" sz="1400" b="1" u="none" strike="noStrike">
+              <a:rPr lang="en-US" sz="1400" b="1" u="none" strike="noStrike" dirty="0">
                 <a:solidFill>
                   <a:srgbClr val="000000"/>
                 </a:solidFill>
@@ -5885,7 +5839,7 @@
               </a:rPr>
               <a:t>Two Key Takeaway Section Three:</a:t>
             </a:r>
-            <a:endParaRPr lang="en-US" sz="1400" b="0" u="none" strike="noStrike">
+            <a:endParaRPr lang="en-US" sz="1400" b="0" u="none" strike="noStrike" dirty="0">
               <a:solidFill>
                 <a:srgbClr val="FFFFFF"/>
               </a:solidFill>
@@ -5911,7 +5865,7 @@
                 <a:tab pos="10058400" algn="l"/>
               </a:tabLst>
             </a:pPr>
-            <a:endParaRPr lang="en-US" sz="1400" b="0" u="none" strike="noStrike">
+            <a:endParaRPr lang="en-US" sz="1400" b="0" u="none" strike="noStrike" dirty="0">
               <a:solidFill>
                 <a:srgbClr val="FFFFFF"/>
               </a:solidFill>
@@ -5937,7 +5891,7 @@
                 <a:tab pos="10058400" algn="l"/>
               </a:tabLst>
             </a:pPr>
-            <a:endParaRPr lang="en-US" sz="1400" b="0" u="none" strike="noStrike">
+            <a:endParaRPr lang="en-US" sz="1400" b="0" u="none" strike="noStrike" dirty="0">
               <a:solidFill>
                 <a:srgbClr val="FFFFFF"/>
               </a:solidFill>
@@ -5963,7 +5917,7 @@
                 <a:tab pos="10058400" algn="l"/>
               </a:tabLst>
             </a:pPr>
-            <a:endParaRPr lang="en-US" sz="1400" b="0" u="none" strike="noStrike">
+            <a:endParaRPr lang="en-US" sz="1400" b="0" u="none" strike="noStrike" dirty="0">
               <a:solidFill>
                 <a:srgbClr val="FFFFFF"/>
               </a:solidFill>
@@ -5989,7 +5943,7 @@
                 <a:tab pos="10058400" algn="l"/>
               </a:tabLst>
             </a:pPr>
-            <a:endParaRPr lang="en-US" sz="1400" b="0" u="none" strike="noStrike">
+            <a:endParaRPr lang="en-US" sz="1400" b="0" u="none" strike="noStrike" dirty="0">
               <a:solidFill>
                 <a:srgbClr val="FFFFFF"/>
               </a:solidFill>
@@ -6015,33 +5969,7 @@
                 <a:tab pos="10058400" algn="l"/>
               </a:tabLst>
             </a:pPr>
-            <a:endParaRPr lang="en-US" sz="1400" b="0" u="none" strike="noStrike">
-              <a:solidFill>
-                <a:srgbClr val="FFFFFF"/>
-              </a:solidFill>
-              <a:effectLst/>
-              <a:uFillTx/>
-              <a:latin typeface="Neue Haas Grotesk Text Pro"/>
-            </a:endParaRPr>
-          </a:p>
-          <a:p>
-            <a:pPr>
-              <a:tabLst>
-                <a:tab pos="0" algn="l"/>
-                <a:tab pos="914400" algn="l"/>
-                <a:tab pos="1828800" algn="l"/>
-                <a:tab pos="2743200" algn="l"/>
-                <a:tab pos="3657600" algn="l"/>
-                <a:tab pos="4572000" algn="l"/>
-                <a:tab pos="5486400" algn="l"/>
-                <a:tab pos="6400800" algn="l"/>
-                <a:tab pos="7315200" algn="l"/>
-                <a:tab pos="8229600" algn="l"/>
-                <a:tab pos="9144000" algn="l"/>
-                <a:tab pos="10058400" algn="l"/>
-              </a:tabLst>
-            </a:pPr>
-            <a:endParaRPr lang="en-US" sz="1400" b="0" u="none" strike="noStrike">
+            <a:endParaRPr lang="en-US" sz="1400" b="0" u="none" strike="noStrike" dirty="0">
               <a:solidFill>
                 <a:srgbClr val="FFFFFF"/>
               </a:solidFill>
@@ -6061,7 +5989,7 @@
         <p:spPr>
           <a:xfrm>
             <a:off x="55440" y="3627360"/>
-            <a:ext cx="5943600" cy="1585800"/>
+            <a:ext cx="5943600" cy="1387176"/>
           </a:xfrm>
           <a:prstGeom prst="rect">
             <a:avLst/>
@@ -6119,7 +6047,7 @@
               </a:tabLst>
             </a:pPr>
             <a:r>
-              <a:rPr lang="en-US" sz="1400" b="1" u="none" strike="noStrike">
+              <a:rPr lang="en-US" sz="1400" b="1" u="none" strike="noStrike" dirty="0">
                 <a:solidFill>
                   <a:srgbClr val="000000"/>
                 </a:solidFill>
@@ -6129,7 +6057,7 @@
               </a:rPr>
               <a:t>Two Key Takeaway Section Five:</a:t>
             </a:r>
-            <a:endParaRPr lang="en-US" sz="1400" b="0" u="none" strike="noStrike">
+            <a:endParaRPr lang="en-US" sz="1400" b="0" u="none" strike="noStrike" dirty="0">
               <a:solidFill>
                 <a:srgbClr val="FFFFFF"/>
               </a:solidFill>
@@ -6155,7 +6083,7 @@
                 <a:tab pos="10058400" algn="l"/>
               </a:tabLst>
             </a:pPr>
-            <a:endParaRPr lang="en-US" sz="1400" b="0" u="none" strike="noStrike">
+            <a:endParaRPr lang="en-US" sz="1400" b="0" u="none" strike="noStrike" dirty="0">
               <a:solidFill>
                 <a:srgbClr val="FFFFFF"/>
               </a:solidFill>
@@ -6181,7 +6109,7 @@
                 <a:tab pos="10058400" algn="l"/>
               </a:tabLst>
             </a:pPr>
-            <a:endParaRPr lang="en-US" sz="1400" b="0" u="none" strike="noStrike">
+            <a:endParaRPr lang="en-US" sz="1400" b="0" u="none" strike="noStrike" dirty="0">
               <a:solidFill>
                 <a:srgbClr val="FFFFFF"/>
               </a:solidFill>
@@ -6207,7 +6135,7 @@
                 <a:tab pos="10058400" algn="l"/>
               </a:tabLst>
             </a:pPr>
-            <a:endParaRPr lang="en-US" sz="1400" b="0" u="none" strike="noStrike">
+            <a:endParaRPr lang="en-US" sz="1400" b="0" u="none" strike="noStrike" dirty="0">
               <a:solidFill>
                 <a:srgbClr val="FFFFFF"/>
               </a:solidFill>
@@ -6233,7 +6161,7 @@
                 <a:tab pos="10058400" algn="l"/>
               </a:tabLst>
             </a:pPr>
-            <a:endParaRPr lang="en-US" sz="1400" b="0" u="none" strike="noStrike">
+            <a:endParaRPr lang="en-US" sz="1400" b="0" u="none" strike="noStrike" dirty="0">
               <a:solidFill>
                 <a:srgbClr val="FFFFFF"/>
               </a:solidFill>
@@ -6259,33 +6187,7 @@
                 <a:tab pos="10058400" algn="l"/>
               </a:tabLst>
             </a:pPr>
-            <a:endParaRPr lang="en-US" sz="1400" b="0" u="none" strike="noStrike">
-              <a:solidFill>
-                <a:srgbClr val="FFFFFF"/>
-              </a:solidFill>
-              <a:effectLst/>
-              <a:uFillTx/>
-              <a:latin typeface="Neue Haas Grotesk Text Pro"/>
-            </a:endParaRPr>
-          </a:p>
-          <a:p>
-            <a:pPr>
-              <a:tabLst>
-                <a:tab pos="0" algn="l"/>
-                <a:tab pos="914400" algn="l"/>
-                <a:tab pos="1828800" algn="l"/>
-                <a:tab pos="2743200" algn="l"/>
-                <a:tab pos="3657600" algn="l"/>
-                <a:tab pos="4572000" algn="l"/>
-                <a:tab pos="5486400" algn="l"/>
-                <a:tab pos="6400800" algn="l"/>
-                <a:tab pos="7315200" algn="l"/>
-                <a:tab pos="8229600" algn="l"/>
-                <a:tab pos="9144000" algn="l"/>
-                <a:tab pos="10058400" algn="l"/>
-              </a:tabLst>
-            </a:pPr>
-            <a:endParaRPr lang="en-US" sz="1400" b="0" u="none" strike="noStrike">
+            <a:endParaRPr lang="en-US" sz="1400" b="0" u="none" strike="noStrike" dirty="0">
               <a:solidFill>
                 <a:srgbClr val="FFFFFF"/>
               </a:solidFill>
@@ -6305,7 +6207,7 @@
         <p:spPr>
           <a:xfrm>
             <a:off x="55440" y="5227560"/>
-            <a:ext cx="5943600" cy="1585800"/>
+            <a:ext cx="5943600" cy="1387176"/>
           </a:xfrm>
           <a:prstGeom prst="rect">
             <a:avLst/>
@@ -6363,7 +6265,7 @@
               </a:tabLst>
             </a:pPr>
             <a:r>
-              <a:rPr lang="en-US" sz="1400" b="1" u="none" strike="noStrike">
+              <a:rPr lang="en-US" sz="1400" b="1" u="none" strike="noStrike" dirty="0">
                 <a:solidFill>
                   <a:srgbClr val="000000"/>
                 </a:solidFill>
@@ -6373,7 +6275,7 @@
               </a:rPr>
               <a:t>Two Key Takeaway Section Seven:</a:t>
             </a:r>
-            <a:endParaRPr lang="en-US" sz="1400" b="0" u="none" strike="noStrike">
+            <a:endParaRPr lang="en-US" sz="1400" b="0" u="none" strike="noStrike" dirty="0">
               <a:solidFill>
                 <a:srgbClr val="FFFFFF"/>
               </a:solidFill>
@@ -6399,7 +6301,7 @@
                 <a:tab pos="10058400" algn="l"/>
               </a:tabLst>
             </a:pPr>
-            <a:endParaRPr lang="en-US" sz="1400" b="0" u="none" strike="noStrike">
+            <a:endParaRPr lang="en-US" sz="1400" b="0" u="none" strike="noStrike" dirty="0">
               <a:solidFill>
                 <a:srgbClr val="FFFFFF"/>
               </a:solidFill>
@@ -6425,7 +6327,7 @@
                 <a:tab pos="10058400" algn="l"/>
               </a:tabLst>
             </a:pPr>
-            <a:endParaRPr lang="en-US" sz="1400" b="0" u="none" strike="noStrike">
+            <a:endParaRPr lang="en-US" sz="1400" b="0" u="none" strike="noStrike" dirty="0">
               <a:solidFill>
                 <a:srgbClr val="FFFFFF"/>
               </a:solidFill>
@@ -6451,7 +6353,7 @@
                 <a:tab pos="10058400" algn="l"/>
               </a:tabLst>
             </a:pPr>
-            <a:endParaRPr lang="en-US" sz="1400" b="0" u="none" strike="noStrike">
+            <a:endParaRPr lang="en-US" sz="1400" b="0" u="none" strike="noStrike" dirty="0">
               <a:solidFill>
                 <a:srgbClr val="FFFFFF"/>
               </a:solidFill>
@@ -6477,7 +6379,7 @@
                 <a:tab pos="10058400" algn="l"/>
               </a:tabLst>
             </a:pPr>
-            <a:endParaRPr lang="en-US" sz="1400" b="0" u="none" strike="noStrike">
+            <a:endParaRPr lang="en-US" sz="1400" b="0" u="none" strike="noStrike" dirty="0">
               <a:solidFill>
                 <a:srgbClr val="FFFFFF"/>
               </a:solidFill>
@@ -6503,33 +6405,7 @@
                 <a:tab pos="10058400" algn="l"/>
               </a:tabLst>
             </a:pPr>
-            <a:endParaRPr lang="en-US" sz="1400" b="0" u="none" strike="noStrike">
-              <a:solidFill>
-                <a:srgbClr val="FFFFFF"/>
-              </a:solidFill>
-              <a:effectLst/>
-              <a:uFillTx/>
-              <a:latin typeface="Neue Haas Grotesk Text Pro"/>
-            </a:endParaRPr>
-          </a:p>
-          <a:p>
-            <a:pPr>
-              <a:tabLst>
-                <a:tab pos="0" algn="l"/>
-                <a:tab pos="914400" algn="l"/>
-                <a:tab pos="1828800" algn="l"/>
-                <a:tab pos="2743200" algn="l"/>
-                <a:tab pos="3657600" algn="l"/>
-                <a:tab pos="4572000" algn="l"/>
-                <a:tab pos="5486400" algn="l"/>
-                <a:tab pos="6400800" algn="l"/>
-                <a:tab pos="7315200" algn="l"/>
-                <a:tab pos="8229600" algn="l"/>
-                <a:tab pos="9144000" algn="l"/>
-                <a:tab pos="10058400" algn="l"/>
-              </a:tabLst>
-            </a:pPr>
-            <a:endParaRPr lang="en-US" sz="1400" b="0" u="none" strike="noStrike">
+            <a:endParaRPr lang="en-US" sz="1400" b="0" u="none" strike="noStrike" dirty="0">
               <a:solidFill>
                 <a:srgbClr val="FFFFFF"/>
               </a:solidFill>
@@ -6549,7 +6425,7 @@
         <p:spPr>
           <a:xfrm>
             <a:off x="6141960" y="2039760"/>
-            <a:ext cx="5943600" cy="1585800"/>
+            <a:ext cx="5943600" cy="1387176"/>
           </a:xfrm>
           <a:prstGeom prst="rect">
             <a:avLst/>
@@ -6607,7 +6483,7 @@
               </a:tabLst>
             </a:pPr>
             <a:r>
-              <a:rPr lang="en-US" sz="1400" b="1" u="none" strike="noStrike">
+              <a:rPr lang="en-US" sz="1400" b="1" u="none" strike="noStrike" dirty="0">
                 <a:solidFill>
                   <a:srgbClr val="000000"/>
                 </a:solidFill>
@@ -6617,7 +6493,7 @@
               </a:rPr>
               <a:t>Two Key Takeaway Section Four:</a:t>
             </a:r>
-            <a:endParaRPr lang="en-US" sz="1400" b="0" u="none" strike="noStrike">
+            <a:endParaRPr lang="en-US" sz="1400" b="0" u="none" strike="noStrike" dirty="0">
               <a:solidFill>
                 <a:srgbClr val="FFFFFF"/>
               </a:solidFill>
@@ -6643,7 +6519,7 @@
                 <a:tab pos="10058400" algn="l"/>
               </a:tabLst>
             </a:pPr>
-            <a:endParaRPr lang="en-US" sz="1400" b="0" u="none" strike="noStrike">
+            <a:endParaRPr lang="en-US" sz="1400" b="0" u="none" strike="noStrike" dirty="0">
               <a:solidFill>
                 <a:srgbClr val="FFFFFF"/>
               </a:solidFill>
@@ -6669,7 +6545,7 @@
                 <a:tab pos="10058400" algn="l"/>
               </a:tabLst>
             </a:pPr>
-            <a:endParaRPr lang="en-US" sz="1400" b="0" u="none" strike="noStrike">
+            <a:endParaRPr lang="en-US" sz="1400" b="0" u="none" strike="noStrike" dirty="0">
               <a:solidFill>
                 <a:srgbClr val="FFFFFF"/>
               </a:solidFill>
@@ -6695,7 +6571,7 @@
                 <a:tab pos="10058400" algn="l"/>
               </a:tabLst>
             </a:pPr>
-            <a:endParaRPr lang="en-US" sz="1400" b="0" u="none" strike="noStrike">
+            <a:endParaRPr lang="en-US" sz="1400" b="0" u="none" strike="noStrike" dirty="0">
               <a:solidFill>
                 <a:srgbClr val="FFFFFF"/>
               </a:solidFill>
@@ -6721,7 +6597,7 @@
                 <a:tab pos="10058400" algn="l"/>
               </a:tabLst>
             </a:pPr>
-            <a:endParaRPr lang="en-US" sz="1400" b="0" u="none" strike="noStrike">
+            <a:endParaRPr lang="en-US" sz="1400" b="0" u="none" strike="noStrike" dirty="0">
               <a:solidFill>
                 <a:srgbClr val="FFFFFF"/>
               </a:solidFill>
@@ -6747,33 +6623,7 @@
                 <a:tab pos="10058400" algn="l"/>
               </a:tabLst>
             </a:pPr>
-            <a:endParaRPr lang="en-US" sz="1400" b="0" u="none" strike="noStrike">
-              <a:solidFill>
-                <a:srgbClr val="FFFFFF"/>
-              </a:solidFill>
-              <a:effectLst/>
-              <a:uFillTx/>
-              <a:latin typeface="Neue Haas Grotesk Text Pro"/>
-            </a:endParaRPr>
-          </a:p>
-          <a:p>
-            <a:pPr>
-              <a:tabLst>
-                <a:tab pos="0" algn="l"/>
-                <a:tab pos="914400" algn="l"/>
-                <a:tab pos="1828800" algn="l"/>
-                <a:tab pos="2743200" algn="l"/>
-                <a:tab pos="3657600" algn="l"/>
-                <a:tab pos="4572000" algn="l"/>
-                <a:tab pos="5486400" algn="l"/>
-                <a:tab pos="6400800" algn="l"/>
-                <a:tab pos="7315200" algn="l"/>
-                <a:tab pos="8229600" algn="l"/>
-                <a:tab pos="9144000" algn="l"/>
-                <a:tab pos="10058400" algn="l"/>
-              </a:tabLst>
-            </a:pPr>
-            <a:endParaRPr lang="en-US" sz="1400" b="0" u="none" strike="noStrike">
+            <a:endParaRPr lang="en-US" sz="1400" b="0" u="none" strike="noStrike" dirty="0">
               <a:solidFill>
                 <a:srgbClr val="FFFFFF"/>
               </a:solidFill>
@@ -6793,7 +6643,7 @@
         <p:spPr>
           <a:xfrm>
             <a:off x="6141960" y="3627360"/>
-            <a:ext cx="5943600" cy="1585800"/>
+            <a:ext cx="5943600" cy="1387176"/>
           </a:xfrm>
           <a:prstGeom prst="rect">
             <a:avLst/>
@@ -6851,7 +6701,7 @@
               </a:tabLst>
             </a:pPr>
             <a:r>
-              <a:rPr lang="en-US" sz="1400" b="1" u="none" strike="noStrike">
+              <a:rPr lang="en-US" sz="1400" b="1" u="none" strike="noStrike" dirty="0">
                 <a:solidFill>
                   <a:srgbClr val="000000"/>
                 </a:solidFill>
@@ -6861,7 +6711,7 @@
               </a:rPr>
               <a:t>Two Key Takeaway Section Six:</a:t>
             </a:r>
-            <a:endParaRPr lang="en-US" sz="1400" b="0" u="none" strike="noStrike">
+            <a:endParaRPr lang="en-US" sz="1400" b="0" u="none" strike="noStrike" dirty="0">
               <a:solidFill>
                 <a:srgbClr val="FFFFFF"/>
               </a:solidFill>
@@ -6887,7 +6737,7 @@
                 <a:tab pos="10058400" algn="l"/>
               </a:tabLst>
             </a:pPr>
-            <a:endParaRPr lang="en-US" sz="1400" b="0" u="none" strike="noStrike">
+            <a:endParaRPr lang="en-US" sz="1400" b="0" u="none" strike="noStrike" dirty="0">
               <a:solidFill>
                 <a:srgbClr val="FFFFFF"/>
               </a:solidFill>
@@ -6913,7 +6763,7 @@
                 <a:tab pos="10058400" algn="l"/>
               </a:tabLst>
             </a:pPr>
-            <a:endParaRPr lang="en-US" sz="1400" b="0" u="none" strike="noStrike">
+            <a:endParaRPr lang="en-US" sz="1400" b="0" u="none" strike="noStrike" dirty="0">
               <a:solidFill>
                 <a:srgbClr val="FFFFFF"/>
               </a:solidFill>
@@ -6939,7 +6789,7 @@
                 <a:tab pos="10058400" algn="l"/>
               </a:tabLst>
             </a:pPr>
-            <a:endParaRPr lang="en-US" sz="1400" b="0" u="none" strike="noStrike">
+            <a:endParaRPr lang="en-US" sz="1400" b="0" u="none" strike="noStrike" dirty="0">
               <a:solidFill>
                 <a:srgbClr val="FFFFFF"/>
               </a:solidFill>
@@ -6965,7 +6815,7 @@
                 <a:tab pos="10058400" algn="l"/>
               </a:tabLst>
             </a:pPr>
-            <a:endParaRPr lang="en-US" sz="1400" b="0" u="none" strike="noStrike">
+            <a:endParaRPr lang="en-US" sz="1400" b="0" u="none" strike="noStrike" dirty="0">
               <a:solidFill>
                 <a:srgbClr val="FFFFFF"/>
               </a:solidFill>
@@ -6991,33 +6841,7 @@
                 <a:tab pos="10058400" algn="l"/>
               </a:tabLst>
             </a:pPr>
-            <a:endParaRPr lang="en-US" sz="1400" b="0" u="none" strike="noStrike">
-              <a:solidFill>
-                <a:srgbClr val="FFFFFF"/>
-              </a:solidFill>
-              <a:effectLst/>
-              <a:uFillTx/>
-              <a:latin typeface="Neue Haas Grotesk Text Pro"/>
-            </a:endParaRPr>
-          </a:p>
-          <a:p>
-            <a:pPr>
-              <a:tabLst>
-                <a:tab pos="0" algn="l"/>
-                <a:tab pos="914400" algn="l"/>
-                <a:tab pos="1828800" algn="l"/>
-                <a:tab pos="2743200" algn="l"/>
-                <a:tab pos="3657600" algn="l"/>
-                <a:tab pos="4572000" algn="l"/>
-                <a:tab pos="5486400" algn="l"/>
-                <a:tab pos="6400800" algn="l"/>
-                <a:tab pos="7315200" algn="l"/>
-                <a:tab pos="8229600" algn="l"/>
-                <a:tab pos="9144000" algn="l"/>
-                <a:tab pos="10058400" algn="l"/>
-              </a:tabLst>
-            </a:pPr>
-            <a:endParaRPr lang="en-US" sz="1400" b="0" u="none" strike="noStrike">
+            <a:endParaRPr lang="en-US" sz="1400" b="0" u="none" strike="noStrike" dirty="0">
               <a:solidFill>
                 <a:srgbClr val="FFFFFF"/>
               </a:solidFill>
@@ -7037,7 +6861,7 @@
         <p:spPr>
           <a:xfrm>
             <a:off x="6141960" y="5227560"/>
-            <a:ext cx="5943600" cy="1585800"/>
+            <a:ext cx="5943600" cy="1387176"/>
           </a:xfrm>
           <a:prstGeom prst="rect">
             <a:avLst/>
@@ -7095,7 +6919,7 @@
               </a:tabLst>
             </a:pPr>
             <a:r>
-              <a:rPr lang="en-US" sz="1400" b="1" u="none" strike="noStrike">
+              <a:rPr lang="en-US" sz="1400" b="1" u="none" strike="noStrike" dirty="0">
                 <a:solidFill>
                   <a:srgbClr val="000000"/>
                 </a:solidFill>
@@ -7105,7 +6929,7 @@
               </a:rPr>
               <a:t>Two Key Takeaway Section Eight:</a:t>
             </a:r>
-            <a:endParaRPr lang="en-US" sz="1400" b="0" u="none" strike="noStrike">
+            <a:endParaRPr lang="en-US" sz="1400" b="0" u="none" strike="noStrike" dirty="0">
               <a:solidFill>
                 <a:srgbClr val="FFFFFF"/>
               </a:solidFill>
@@ -7131,7 +6955,7 @@
                 <a:tab pos="10058400" algn="l"/>
               </a:tabLst>
             </a:pPr>
-            <a:endParaRPr lang="en-US" sz="1400" b="0" u="none" strike="noStrike">
+            <a:endParaRPr lang="en-US" sz="1400" b="0" u="none" strike="noStrike" dirty="0">
               <a:solidFill>
                 <a:srgbClr val="FFFFFF"/>
               </a:solidFill>
@@ -7157,7 +6981,7 @@
                 <a:tab pos="10058400" algn="l"/>
               </a:tabLst>
             </a:pPr>
-            <a:endParaRPr lang="en-US" sz="1400" b="0" u="none" strike="noStrike">
+            <a:endParaRPr lang="en-US" sz="1400" b="0" u="none" strike="noStrike" dirty="0">
               <a:solidFill>
                 <a:srgbClr val="FFFFFF"/>
               </a:solidFill>
@@ -7183,7 +7007,7 @@
                 <a:tab pos="10058400" algn="l"/>
               </a:tabLst>
             </a:pPr>
-            <a:endParaRPr lang="en-US" sz="1400" b="0" u="none" strike="noStrike">
+            <a:endParaRPr lang="en-US" sz="1400" b="0" u="none" strike="noStrike" dirty="0">
               <a:solidFill>
                 <a:srgbClr val="FFFFFF"/>
               </a:solidFill>
@@ -7209,7 +7033,7 @@
                 <a:tab pos="10058400" algn="l"/>
               </a:tabLst>
             </a:pPr>
-            <a:endParaRPr lang="en-US" sz="1400" b="0" u="none" strike="noStrike">
+            <a:endParaRPr lang="en-US" sz="1400" b="0" u="none" strike="noStrike" dirty="0">
               <a:solidFill>
                 <a:srgbClr val="FFFFFF"/>
               </a:solidFill>
@@ -7235,7 +7059,7 @@
                 <a:tab pos="10058400" algn="l"/>
               </a:tabLst>
             </a:pPr>
-            <a:endParaRPr lang="en-US" sz="1400" b="0" u="none" strike="noStrike">
+            <a:endParaRPr lang="en-US" sz="1400" b="0" u="none" strike="noStrike" dirty="0">
               <a:solidFill>
                 <a:srgbClr val="FFFFFF"/>
               </a:solidFill>
@@ -7244,31 +7068,333 @@
               <a:latin typeface="Neue Haas Grotesk Text Pro"/>
             </a:endParaRPr>
           </a:p>
-          <a:p>
-            <a:pPr>
-              <a:tabLst>
-                <a:tab pos="0" algn="l"/>
-                <a:tab pos="914400" algn="l"/>
-                <a:tab pos="1828800" algn="l"/>
-                <a:tab pos="2743200" algn="l"/>
-                <a:tab pos="3657600" algn="l"/>
-                <a:tab pos="4572000" algn="l"/>
-                <a:tab pos="5486400" algn="l"/>
-                <a:tab pos="6400800" algn="l"/>
-                <a:tab pos="7315200" algn="l"/>
-                <a:tab pos="8229600" algn="l"/>
-                <a:tab pos="9144000" algn="l"/>
-                <a:tab pos="10058400" algn="l"/>
-              </a:tabLst>
-            </a:pPr>
-            <a:endParaRPr lang="en-US" sz="1400" b="0" u="none" strike="noStrike">
-              <a:solidFill>
-                <a:srgbClr val="FFFFFF"/>
-              </a:solidFill>
-              <a:effectLst/>
-              <a:uFillTx/>
-              <a:latin typeface="Neue Haas Grotesk Text Pro"/>
-            </a:endParaRPr>
+        </p:txBody>
+      </p:sp>
+      <p:sp>
+        <p:nvSpPr>
+          <p:cNvPr id="2" name="TextBox 1">
+            <a:extLst>
+              <a:ext uri="{FF2B5EF4-FFF2-40B4-BE49-F238E27FC236}">
+                <a16:creationId xmlns:a16="http://schemas.microsoft.com/office/drawing/2014/main" id="{E86ACBFC-71B7-65CE-0ADE-76C25451422C}"/>
+              </a:ext>
+            </a:extLst>
+          </p:cNvPr>
+          <p:cNvSpPr txBox="1"/>
+          <p:nvPr/>
+        </p:nvSpPr>
+        <p:spPr>
+          <a:xfrm>
+            <a:off x="101160" y="750240"/>
+            <a:ext cx="5852160" cy="1005840"/>
+          </a:xfrm>
+          <a:prstGeom prst="rect">
+            <a:avLst/>
+          </a:prstGeom>
+          <a:noFill/>
+        </p:spPr>
+        <p:txBody>
+          <a:bodyPr wrap="square" rtlCol="0">
+            <a:spAutoFit/>
+          </a:bodyPr>
+          <a:lstStyle/>
+          <a:p>
+            <a:endParaRPr lang="en-US" sz="1200" dirty="0"/>
+          </a:p>
+          <a:p>
+            <a:endParaRPr lang="en-US" sz="1200" dirty="0"/>
+          </a:p>
+          <a:p>
+            <a:endParaRPr lang="en-US" sz="1200" dirty="0"/>
+          </a:p>
+          <a:p>
+            <a:endParaRPr lang="en-US" sz="1200" dirty="0"/>
+          </a:p>
+        </p:txBody>
+      </p:sp>
+      <p:sp>
+        <p:nvSpPr>
+          <p:cNvPr id="4" name="TextBox 3">
+            <a:extLst>
+              <a:ext uri="{FF2B5EF4-FFF2-40B4-BE49-F238E27FC236}">
+                <a16:creationId xmlns:a16="http://schemas.microsoft.com/office/drawing/2014/main" id="{6B59C306-78E5-F03D-03C1-770F12967B77}"/>
+              </a:ext>
+            </a:extLst>
+          </p:cNvPr>
+          <p:cNvSpPr txBox="1"/>
+          <p:nvPr/>
+        </p:nvSpPr>
+        <p:spPr>
+          <a:xfrm>
+            <a:off x="6187680" y="704784"/>
+            <a:ext cx="5852160" cy="1005840"/>
+          </a:xfrm>
+          <a:prstGeom prst="rect">
+            <a:avLst/>
+          </a:prstGeom>
+          <a:noFill/>
+        </p:spPr>
+        <p:txBody>
+          <a:bodyPr wrap="square" rtlCol="0">
+            <a:spAutoFit/>
+          </a:bodyPr>
+          <a:lstStyle/>
+          <a:p>
+            <a:endParaRPr lang="en-US" sz="1200" dirty="0"/>
+          </a:p>
+          <a:p>
+            <a:endParaRPr lang="en-US" sz="1200" dirty="0"/>
+          </a:p>
+          <a:p>
+            <a:endParaRPr lang="en-US" sz="1200" dirty="0"/>
+          </a:p>
+          <a:p>
+            <a:endParaRPr lang="en-US" sz="1200" dirty="0"/>
+          </a:p>
+        </p:txBody>
+      </p:sp>
+      <p:sp>
+        <p:nvSpPr>
+          <p:cNvPr id="6" name="TextBox 5">
+            <a:extLst>
+              <a:ext uri="{FF2B5EF4-FFF2-40B4-BE49-F238E27FC236}">
+                <a16:creationId xmlns:a16="http://schemas.microsoft.com/office/drawing/2014/main" id="{1A2AB6BC-59D1-EBE5-85C1-BF40A4CE9D78}"/>
+              </a:ext>
+            </a:extLst>
+          </p:cNvPr>
+          <p:cNvSpPr txBox="1"/>
+          <p:nvPr/>
+        </p:nvSpPr>
+        <p:spPr>
+          <a:xfrm>
+            <a:off x="55440" y="2350440"/>
+            <a:ext cx="5852160" cy="1005840"/>
+          </a:xfrm>
+          <a:prstGeom prst="rect">
+            <a:avLst/>
+          </a:prstGeom>
+          <a:noFill/>
+        </p:spPr>
+        <p:txBody>
+          <a:bodyPr wrap="square" rtlCol="0">
+            <a:spAutoFit/>
+          </a:bodyPr>
+          <a:lstStyle/>
+          <a:p>
+            <a:endParaRPr lang="en-US" sz="1200" dirty="0"/>
+          </a:p>
+          <a:p>
+            <a:endParaRPr lang="en-US" sz="1200" dirty="0"/>
+          </a:p>
+          <a:p>
+            <a:endParaRPr lang="en-US" sz="1200" dirty="0"/>
+          </a:p>
+          <a:p>
+            <a:endParaRPr lang="en-US" sz="1200" dirty="0"/>
+          </a:p>
+        </p:txBody>
+      </p:sp>
+      <p:sp>
+        <p:nvSpPr>
+          <p:cNvPr id="8" name="TextBox 7">
+            <a:extLst>
+              <a:ext uri="{FF2B5EF4-FFF2-40B4-BE49-F238E27FC236}">
+                <a16:creationId xmlns:a16="http://schemas.microsoft.com/office/drawing/2014/main" id="{9E362ABB-C943-2C0E-FF7E-F1972E1B3590}"/>
+              </a:ext>
+            </a:extLst>
+          </p:cNvPr>
+          <p:cNvSpPr txBox="1"/>
+          <p:nvPr/>
+        </p:nvSpPr>
+        <p:spPr>
+          <a:xfrm>
+            <a:off x="110190" y="3922803"/>
+            <a:ext cx="5852160" cy="1005840"/>
+          </a:xfrm>
+          <a:prstGeom prst="rect">
+            <a:avLst/>
+          </a:prstGeom>
+          <a:noFill/>
+        </p:spPr>
+        <p:txBody>
+          <a:bodyPr wrap="square" rtlCol="0">
+            <a:spAutoFit/>
+          </a:bodyPr>
+          <a:lstStyle/>
+          <a:p>
+            <a:endParaRPr lang="en-US" sz="1200" dirty="0"/>
+          </a:p>
+          <a:p>
+            <a:endParaRPr lang="en-US" sz="1200" dirty="0"/>
+          </a:p>
+          <a:p>
+            <a:endParaRPr lang="en-US" sz="1200" dirty="0"/>
+          </a:p>
+          <a:p>
+            <a:endParaRPr lang="en-US" sz="1200" dirty="0"/>
+          </a:p>
+        </p:txBody>
+      </p:sp>
+      <p:sp>
+        <p:nvSpPr>
+          <p:cNvPr id="10" name="TextBox 9">
+            <a:extLst>
+              <a:ext uri="{FF2B5EF4-FFF2-40B4-BE49-F238E27FC236}">
+                <a16:creationId xmlns:a16="http://schemas.microsoft.com/office/drawing/2014/main" id="{0E562886-DD22-58DA-79EF-E562C7D73106}"/>
+              </a:ext>
+            </a:extLst>
+          </p:cNvPr>
+          <p:cNvSpPr txBox="1"/>
+          <p:nvPr/>
+        </p:nvSpPr>
+        <p:spPr>
+          <a:xfrm>
+            <a:off x="110190" y="5513478"/>
+            <a:ext cx="5852160" cy="1005840"/>
+          </a:xfrm>
+          <a:prstGeom prst="rect">
+            <a:avLst/>
+          </a:prstGeom>
+          <a:noFill/>
+        </p:spPr>
+        <p:txBody>
+          <a:bodyPr wrap="square" rtlCol="0">
+            <a:spAutoFit/>
+          </a:bodyPr>
+          <a:lstStyle/>
+          <a:p>
+            <a:endParaRPr lang="en-US" sz="1200" dirty="0"/>
+          </a:p>
+          <a:p>
+            <a:endParaRPr lang="en-US" sz="1200" dirty="0"/>
+          </a:p>
+          <a:p>
+            <a:endParaRPr lang="en-US" sz="1200" dirty="0"/>
+          </a:p>
+          <a:p>
+            <a:endParaRPr lang="en-US" sz="1200" dirty="0"/>
+          </a:p>
+        </p:txBody>
+      </p:sp>
+      <p:sp>
+        <p:nvSpPr>
+          <p:cNvPr id="12" name="TextBox 11">
+            <a:extLst>
+              <a:ext uri="{FF2B5EF4-FFF2-40B4-BE49-F238E27FC236}">
+                <a16:creationId xmlns:a16="http://schemas.microsoft.com/office/drawing/2014/main" id="{9EA9BDA3-443F-8CC5-BF09-759D9D4F6125}"/>
+              </a:ext>
+            </a:extLst>
+          </p:cNvPr>
+          <p:cNvSpPr txBox="1"/>
+          <p:nvPr/>
+        </p:nvSpPr>
+        <p:spPr>
+          <a:xfrm>
+            <a:off x="6187680" y="5513478"/>
+            <a:ext cx="5852160" cy="1005840"/>
+          </a:xfrm>
+          <a:prstGeom prst="rect">
+            <a:avLst/>
+          </a:prstGeom>
+          <a:noFill/>
+        </p:spPr>
+        <p:txBody>
+          <a:bodyPr wrap="square" rtlCol="0">
+            <a:spAutoFit/>
+          </a:bodyPr>
+          <a:lstStyle/>
+          <a:p>
+            <a:endParaRPr lang="en-US" sz="1200" dirty="0"/>
+          </a:p>
+          <a:p>
+            <a:endParaRPr lang="en-US" sz="1200" dirty="0"/>
+          </a:p>
+          <a:p>
+            <a:endParaRPr lang="en-US" sz="1200" dirty="0"/>
+          </a:p>
+          <a:p>
+            <a:endParaRPr lang="en-US" sz="1200" dirty="0"/>
+          </a:p>
+        </p:txBody>
+      </p:sp>
+      <p:sp>
+        <p:nvSpPr>
+          <p:cNvPr id="14" name="TextBox 13">
+            <a:extLst>
+              <a:ext uri="{FF2B5EF4-FFF2-40B4-BE49-F238E27FC236}">
+                <a16:creationId xmlns:a16="http://schemas.microsoft.com/office/drawing/2014/main" id="{70317D52-5ACE-AE9B-5DBE-26CBBD85A6A0}"/>
+              </a:ext>
+            </a:extLst>
+          </p:cNvPr>
+          <p:cNvSpPr txBox="1"/>
+          <p:nvPr/>
+        </p:nvSpPr>
+        <p:spPr>
+          <a:xfrm>
+            <a:off x="6187680" y="3922803"/>
+            <a:ext cx="5852160" cy="1005840"/>
+          </a:xfrm>
+          <a:prstGeom prst="rect">
+            <a:avLst/>
+          </a:prstGeom>
+          <a:noFill/>
+        </p:spPr>
+        <p:txBody>
+          <a:bodyPr wrap="square" rtlCol="0">
+            <a:spAutoFit/>
+          </a:bodyPr>
+          <a:lstStyle/>
+          <a:p>
+            <a:endParaRPr lang="en-US" sz="1200" dirty="0"/>
+          </a:p>
+          <a:p>
+            <a:endParaRPr lang="en-US" sz="1200" dirty="0"/>
+          </a:p>
+          <a:p>
+            <a:endParaRPr lang="en-US" sz="1200" dirty="0"/>
+          </a:p>
+          <a:p>
+            <a:endParaRPr lang="en-US" sz="1200" dirty="0"/>
+          </a:p>
+        </p:txBody>
+      </p:sp>
+      <p:sp>
+        <p:nvSpPr>
+          <p:cNvPr id="16" name="TextBox 15">
+            <a:extLst>
+              <a:ext uri="{FF2B5EF4-FFF2-40B4-BE49-F238E27FC236}">
+                <a16:creationId xmlns:a16="http://schemas.microsoft.com/office/drawing/2014/main" id="{015F31B0-7E7A-FF1E-494E-801EB91DB3C8}"/>
+              </a:ext>
+            </a:extLst>
+          </p:cNvPr>
+          <p:cNvSpPr txBox="1"/>
+          <p:nvPr/>
+        </p:nvSpPr>
+        <p:spPr>
+          <a:xfrm>
+            <a:off x="6141960" y="2350440"/>
+            <a:ext cx="5852160" cy="1005840"/>
+          </a:xfrm>
+          <a:prstGeom prst="rect">
+            <a:avLst/>
+          </a:prstGeom>
+          <a:noFill/>
+        </p:spPr>
+        <p:txBody>
+          <a:bodyPr wrap="square" rtlCol="0">
+            <a:spAutoFit/>
+          </a:bodyPr>
+          <a:lstStyle/>
+          <a:p>
+            <a:endParaRPr lang="en-US" sz="1200" dirty="0"/>
+          </a:p>
+          <a:p>
+            <a:endParaRPr lang="en-US" sz="1200" dirty="0"/>
+          </a:p>
+          <a:p>
+            <a:endParaRPr lang="en-US" sz="1200" dirty="0"/>
+          </a:p>
+          <a:p>
+            <a:endParaRPr lang="en-US" sz="1200" dirty="0"/>
           </a:p>
         </p:txBody>
       </p:sp>
@@ -7281,6 +7407,89 @@
 </file>
 
 <file path=ppt/slides/slide11.xml><?xml version="1.0" encoding="utf-8"?>
+<p:sld xmlns:a="http://schemas.openxmlformats.org/drawingml/2006/main" xmlns:r="http://schemas.openxmlformats.org/officeDocument/2006/relationships" xmlns:p="http://schemas.openxmlformats.org/presentationml/2006/main">
+  <p:cSld>
+    <p:spTree>
+      <p:nvGrpSpPr>
+        <p:cNvPr id="1" name=""/>
+        <p:cNvGrpSpPr/>
+        <p:nvPr/>
+      </p:nvGrpSpPr>
+      <p:grpSpPr>
+        <a:xfrm>
+          <a:off x="0" y="0"/>
+          <a:ext cx="0" cy="0"/>
+          <a:chOff x="0" y="0"/>
+          <a:chExt cx="0" cy="0"/>
+        </a:xfrm>
+      </p:grpSpPr>
+      <p:sp>
+        <p:nvSpPr>
+          <p:cNvPr id="2" name="Title 1">
+            <a:extLst>
+              <a:ext uri="{FF2B5EF4-FFF2-40B4-BE49-F238E27FC236}">
+                <a16:creationId xmlns:a16="http://schemas.microsoft.com/office/drawing/2014/main" id="{99D76EF2-F045-C1D0-5C3C-C3A54A101498}"/>
+              </a:ext>
+            </a:extLst>
+          </p:cNvPr>
+          <p:cNvSpPr>
+            <a:spLocks noGrp="1"/>
+          </p:cNvSpPr>
+          <p:nvPr>
+            <p:ph type="title"/>
+          </p:nvPr>
+        </p:nvSpPr>
+        <p:spPr/>
+        <p:txBody>
+          <a:bodyPr/>
+          <a:lstStyle/>
+          <a:p>
+            <a:r>
+              <a:rPr lang="en-US" dirty="0"/>
+              <a:t>Final Reflection Slide</a:t>
+            </a:r>
+          </a:p>
+        </p:txBody>
+      </p:sp>
+      <p:sp>
+        <p:nvSpPr>
+          <p:cNvPr id="3" name="Text Placeholder 2">
+            <a:extLst>
+              <a:ext uri="{FF2B5EF4-FFF2-40B4-BE49-F238E27FC236}">
+                <a16:creationId xmlns:a16="http://schemas.microsoft.com/office/drawing/2014/main" id="{DCC87681-05F1-0D0A-F84A-5F239687CBA9}"/>
+              </a:ext>
+            </a:extLst>
+          </p:cNvPr>
+          <p:cNvSpPr>
+            <a:spLocks noGrp="1"/>
+          </p:cNvSpPr>
+          <p:nvPr>
+            <p:ph type="body"/>
+          </p:nvPr>
+        </p:nvSpPr>
+        <p:spPr/>
+        <p:txBody>
+          <a:bodyPr/>
+          <a:lstStyle/>
+          <a:p>
+            <a:endParaRPr lang="en-US"/>
+          </a:p>
+        </p:txBody>
+      </p:sp>
+    </p:spTree>
+    <p:extLst>
+      <p:ext uri="{BB962C8B-B14F-4D97-AF65-F5344CB8AC3E}">
+        <p14:creationId xmlns:p14="http://schemas.microsoft.com/office/powerpoint/2010/main" val="3711985783"/>
+      </p:ext>
+    </p:extLst>
+  </p:cSld>
+  <p:clrMapOvr>
+    <a:masterClrMapping/>
+  </p:clrMapOvr>
+</p:sld>
+</file>
+
+<file path=ppt/slides/slide12.xml><?xml version="1.0" encoding="utf-8"?>
 <p:sld xmlns:a="http://schemas.openxmlformats.org/drawingml/2006/main" xmlns:r="http://schemas.openxmlformats.org/officeDocument/2006/relationships" xmlns:p="http://schemas.openxmlformats.org/presentationml/2006/main">
   <p:cSld>
     <p:spTree>
